--- a/make_presentation/templates/templates/premium/no_logo_8.pptx
+++ b/make_presentation/templates/templates/premium/no_logo_8.pptx
@@ -117,7 +117,13 @@
               <a:rPr b="0" lang="en-US" sz="2000" spc="-1" strike="noStrike">
                 <a:latin typeface="Arial"/>
               </a:rPr>
-              <a:t>Click to edit the notes format</a:t>
+              <a:t>Click to edit the notes </a:t>
+            </a:r>
+            <a:r>
+              <a:rPr b="0" lang="en-US" sz="2000" spc="-1" strike="noStrike">
+                <a:latin typeface="Arial"/>
+              </a:rPr>
+              <a:t>format</a:t>
             </a:r>
             <a:endParaRPr b="0" lang="en-US" sz="2000" spc="-1" strike="noStrike">
               <a:latin typeface="Arial"/>
@@ -302,7 +308,7 @@
             <a:pPr algn="r">
               <a:buNone/>
             </a:pPr>
-            <a:fld id="{C565F7ED-D958-483F-9ED5-19A74E8A56F9}" type="slidenum">
+            <a:fld id="{30BFFA15-9DC5-4E89-BB5D-91F9ED2588F2}" type="slidenum">
               <a:rPr b="0" lang="en-US" sz="1400" spc="-1" strike="noStrike">
                 <a:latin typeface="Times New Roman"/>
               </a:rPr>
@@ -339,7 +345,7 @@
       </p:grpSpPr>
       <p:sp>
         <p:nvSpPr>
-          <p:cNvPr id="125" name="PlaceHolder 1"/>
+          <p:cNvPr id="123" name="PlaceHolder 1"/>
           <p:cNvSpPr>
             <a:spLocks noGrp="1"/>
           </p:cNvSpPr>
@@ -362,7 +368,7 @@
       </p:sp>
       <p:sp>
         <p:nvSpPr>
-          <p:cNvPr id="126" name="PlaceHolder 2"/>
+          <p:cNvPr id="124" name="PlaceHolder 2"/>
           <p:cNvSpPr>
             <a:spLocks noGrp="1"/>
           </p:cNvSpPr>
@@ -396,7 +402,7 @@
       </p:sp>
       <p:sp>
         <p:nvSpPr>
-          <p:cNvPr id="127" name="PlaceHolder 3"/>
+          <p:cNvPr id="125" name="PlaceHolder 3"/>
           <p:cNvSpPr>
             <a:spLocks noGrp="1"/>
           </p:cNvSpPr>
@@ -443,7 +449,7 @@
               </a:lnSpc>
               <a:buNone/>
             </a:pPr>
-            <a:fld id="{7ADF8285-D617-4277-AD97-92D3DE81BD93}" type="slidenum">
+            <a:fld id="{287287B3-9FD9-4A33-AB60-AF2D63F13199}" type="slidenum">
               <a:rPr b="0" lang="en-US" sz="1800" spc="-1" strike="noStrike">
                 <a:solidFill>
                   <a:srgbClr val="000000"/>
@@ -483,7 +489,7 @@
       </p:grpSpPr>
       <p:sp>
         <p:nvSpPr>
-          <p:cNvPr id="128" name="PlaceHolder 1"/>
+          <p:cNvPr id="126" name="PlaceHolder 1"/>
           <p:cNvSpPr>
             <a:spLocks noGrp="1"/>
           </p:cNvSpPr>
@@ -506,7 +512,7 @@
       </p:sp>
       <p:sp>
         <p:nvSpPr>
-          <p:cNvPr id="129" name="PlaceHolder 2"/>
+          <p:cNvPr id="127" name="PlaceHolder 2"/>
           <p:cNvSpPr>
             <a:spLocks noGrp="1"/>
           </p:cNvSpPr>
@@ -540,7 +546,7 @@
       </p:sp>
       <p:sp>
         <p:nvSpPr>
-          <p:cNvPr id="130" name="PlaceHolder 3"/>
+          <p:cNvPr id="128" name="PlaceHolder 3"/>
           <p:cNvSpPr>
             <a:spLocks noGrp="1"/>
           </p:cNvSpPr>
@@ -587,7 +593,7 @@
               </a:lnSpc>
               <a:buNone/>
             </a:pPr>
-            <a:fld id="{6B691B2A-6050-430F-8D77-E0C4465E467B}" type="slidenum">
+            <a:fld id="{A2027968-84FE-4650-8F30-3C056DF10D8F}" type="slidenum">
               <a:rPr b="0" lang="en-US" sz="1800" spc="-1" strike="noStrike">
                 <a:solidFill>
                   <a:srgbClr val="000000"/>
@@ -627,7 +633,7 @@
       </p:grpSpPr>
       <p:sp>
         <p:nvSpPr>
-          <p:cNvPr id="131" name="PlaceHolder 1"/>
+          <p:cNvPr id="129" name="PlaceHolder 1"/>
           <p:cNvSpPr>
             <a:spLocks noGrp="1"/>
           </p:cNvSpPr>
@@ -650,7 +656,7 @@
       </p:sp>
       <p:sp>
         <p:nvSpPr>
-          <p:cNvPr id="132" name="PlaceHolder 2"/>
+          <p:cNvPr id="130" name="PlaceHolder 2"/>
           <p:cNvSpPr>
             <a:spLocks noGrp="1"/>
           </p:cNvSpPr>
@@ -684,7 +690,7 @@
       </p:sp>
       <p:sp>
         <p:nvSpPr>
-          <p:cNvPr id="133" name="PlaceHolder 3"/>
+          <p:cNvPr id="131" name="PlaceHolder 3"/>
           <p:cNvSpPr>
             <a:spLocks noGrp="1"/>
           </p:cNvSpPr>
@@ -731,7 +737,7 @@
               </a:lnSpc>
               <a:buNone/>
             </a:pPr>
-            <a:fld id="{41B2F4C2-4156-4760-9666-C0926E3BC05E}" type="slidenum">
+            <a:fld id="{40D232A5-EF93-4273-96C9-12418FED5CF8}" type="slidenum">
               <a:rPr b="0" lang="en-US" sz="1800" spc="-1" strike="noStrike">
                 <a:solidFill>
                   <a:srgbClr val="000000"/>
@@ -771,7 +777,7 @@
       </p:grpSpPr>
       <p:sp>
         <p:nvSpPr>
-          <p:cNvPr id="134" name="PlaceHolder 1"/>
+          <p:cNvPr id="132" name="PlaceHolder 1"/>
           <p:cNvSpPr>
             <a:spLocks noGrp="1"/>
           </p:cNvSpPr>
@@ -794,7 +800,7 @@
       </p:sp>
       <p:sp>
         <p:nvSpPr>
-          <p:cNvPr id="135" name="PlaceHolder 2"/>
+          <p:cNvPr id="133" name="PlaceHolder 2"/>
           <p:cNvSpPr>
             <a:spLocks noGrp="1"/>
           </p:cNvSpPr>
@@ -828,7 +834,7 @@
       </p:sp>
       <p:sp>
         <p:nvSpPr>
-          <p:cNvPr id="136" name="PlaceHolder 3"/>
+          <p:cNvPr id="134" name="PlaceHolder 3"/>
           <p:cNvSpPr>
             <a:spLocks noGrp="1"/>
           </p:cNvSpPr>
@@ -875,7 +881,7 @@
               </a:lnSpc>
               <a:buNone/>
             </a:pPr>
-            <a:fld id="{DE93C754-5D70-45F0-918B-23C5A6B4B44E}" type="slidenum">
+            <a:fld id="{D2595C4C-24F9-4956-B6FE-3D001FA97512}" type="slidenum">
               <a:rPr b="0" lang="en-US" sz="1800" spc="-1" strike="noStrike">
                 <a:solidFill>
                   <a:srgbClr val="000000"/>
@@ -915,7 +921,7 @@
       </p:grpSpPr>
       <p:sp>
         <p:nvSpPr>
-          <p:cNvPr id="137" name="PlaceHolder 1"/>
+          <p:cNvPr id="135" name="PlaceHolder 1"/>
           <p:cNvSpPr>
             <a:spLocks noGrp="1"/>
           </p:cNvSpPr>
@@ -938,7 +944,7 @@
       </p:sp>
       <p:sp>
         <p:nvSpPr>
-          <p:cNvPr id="138" name="PlaceHolder 2"/>
+          <p:cNvPr id="136" name="PlaceHolder 2"/>
           <p:cNvSpPr>
             <a:spLocks noGrp="1"/>
           </p:cNvSpPr>
@@ -972,7 +978,7 @@
       </p:sp>
       <p:sp>
         <p:nvSpPr>
-          <p:cNvPr id="139" name="PlaceHolder 3"/>
+          <p:cNvPr id="137" name="PlaceHolder 3"/>
           <p:cNvSpPr>
             <a:spLocks noGrp="1"/>
           </p:cNvSpPr>
@@ -1019,7 +1025,7 @@
               </a:lnSpc>
               <a:buNone/>
             </a:pPr>
-            <a:fld id="{71A944D4-0758-4069-ABE7-D38FBD8AC6F9}" type="slidenum">
+            <a:fld id="{2A5263ED-35F2-4334-9DC9-F41580FBAEB2}" type="slidenum">
               <a:rPr b="0" lang="en-US" sz="1800" spc="-1" strike="noStrike">
                 <a:solidFill>
                   <a:srgbClr val="000000"/>
@@ -1059,7 +1065,7 @@
       </p:grpSpPr>
       <p:sp>
         <p:nvSpPr>
-          <p:cNvPr id="140" name="PlaceHolder 1"/>
+          <p:cNvPr id="138" name="PlaceHolder 1"/>
           <p:cNvSpPr>
             <a:spLocks noGrp="1"/>
           </p:cNvSpPr>
@@ -1082,7 +1088,7 @@
       </p:sp>
       <p:sp>
         <p:nvSpPr>
-          <p:cNvPr id="141" name="PlaceHolder 2"/>
+          <p:cNvPr id="139" name="PlaceHolder 2"/>
           <p:cNvSpPr>
             <a:spLocks noGrp="1"/>
           </p:cNvSpPr>
@@ -1116,7 +1122,7 @@
       </p:sp>
       <p:sp>
         <p:nvSpPr>
-          <p:cNvPr id="142" name="PlaceHolder 3"/>
+          <p:cNvPr id="140" name="PlaceHolder 3"/>
           <p:cNvSpPr>
             <a:spLocks noGrp="1"/>
           </p:cNvSpPr>
@@ -1163,7 +1169,7 @@
               </a:lnSpc>
               <a:buNone/>
             </a:pPr>
-            <a:fld id="{9F18D6BC-F508-4580-A88D-91AF7D1995A3}" type="slidenum">
+            <a:fld id="{B8708418-3A1E-42FD-987A-1E8E28CF4FD1}" type="slidenum">
               <a:rPr b="0" lang="en-US" sz="1800" spc="-1" strike="noStrike">
                 <a:solidFill>
                   <a:srgbClr val="000000"/>
@@ -1203,7 +1209,7 @@
       </p:grpSpPr>
       <p:sp>
         <p:nvSpPr>
-          <p:cNvPr id="143" name="PlaceHolder 1"/>
+          <p:cNvPr id="141" name="PlaceHolder 1"/>
           <p:cNvSpPr>
             <a:spLocks noGrp="1"/>
           </p:cNvSpPr>
@@ -1226,7 +1232,7 @@
       </p:sp>
       <p:sp>
         <p:nvSpPr>
-          <p:cNvPr id="144" name="PlaceHolder 2"/>
+          <p:cNvPr id="142" name="PlaceHolder 2"/>
           <p:cNvSpPr>
             <a:spLocks noGrp="1"/>
           </p:cNvSpPr>
@@ -1260,7 +1266,7 @@
       </p:sp>
       <p:sp>
         <p:nvSpPr>
-          <p:cNvPr id="145" name="PlaceHolder 3"/>
+          <p:cNvPr id="143" name="PlaceHolder 3"/>
           <p:cNvSpPr>
             <a:spLocks noGrp="1"/>
           </p:cNvSpPr>
@@ -1307,7 +1313,7 @@
               </a:lnSpc>
               <a:buNone/>
             </a:pPr>
-            <a:fld id="{6FF213AE-C21F-4A37-8AF1-134C1E694817}" type="slidenum">
+            <a:fld id="{1E23C714-5D70-4629-9705-765594EC86A8}" type="slidenum">
               <a:rPr b="0" lang="en-US" sz="1800" spc="-1" strike="noStrike">
                 <a:solidFill>
                   <a:srgbClr val="000000"/>
@@ -1347,7 +1353,7 @@
       </p:grpSpPr>
       <p:sp>
         <p:nvSpPr>
-          <p:cNvPr id="146" name="PlaceHolder 1"/>
+          <p:cNvPr id="144" name="PlaceHolder 1"/>
           <p:cNvSpPr>
             <a:spLocks noGrp="1"/>
           </p:cNvSpPr>
@@ -1370,7 +1376,7 @@
       </p:sp>
       <p:sp>
         <p:nvSpPr>
-          <p:cNvPr id="147" name="PlaceHolder 2"/>
+          <p:cNvPr id="145" name="PlaceHolder 2"/>
           <p:cNvSpPr>
             <a:spLocks noGrp="1"/>
           </p:cNvSpPr>
@@ -1404,7 +1410,7 @@
       </p:sp>
       <p:sp>
         <p:nvSpPr>
-          <p:cNvPr id="148" name="PlaceHolder 3"/>
+          <p:cNvPr id="146" name="PlaceHolder 3"/>
           <p:cNvSpPr>
             <a:spLocks noGrp="1"/>
           </p:cNvSpPr>
@@ -1451,7 +1457,7 @@
               </a:lnSpc>
               <a:buNone/>
             </a:pPr>
-            <a:fld id="{4BC915C6-4971-4ADD-BA8D-3B9042355ABC}" type="slidenum">
+            <a:fld id="{8C1AD8E0-9108-46D8-9EE1-AA9F2307901E}" type="slidenum">
               <a:rPr b="0" lang="en-US" sz="1800" spc="-1" strike="noStrike">
                 <a:solidFill>
                   <a:srgbClr val="000000"/>
@@ -3494,7 +3500,7 @@
         <p:spPr>
           <a:xfrm>
             <a:off x="457200" y="4027680"/>
-            <a:ext cx="10744200" cy="2030760"/>
+            <a:ext cx="10928880" cy="2030760"/>
           </a:xfrm>
           <a:prstGeom prst="rect">
             <a:avLst/>
@@ -3525,7 +3531,7 @@
               </a:tabLst>
             </a:pPr>
             <a:r>
-              <a:rPr b="1" lang="en-US" sz="4000" spc="-1" strike="noStrike">
+              <a:rPr b="1" lang="en-US" sz="4800" spc="-1" strike="noStrike">
                 <a:solidFill>
                   <a:srgbClr val="ffffff"/>
                 </a:solidFill>
@@ -3534,7 +3540,7 @@
               </a:rPr>
               <a:t>TITLE</a:t>
             </a:r>
-            <a:endParaRPr b="0" lang="en-US" sz="4000" spc="-1" strike="noStrike">
+            <a:endParaRPr b="0" lang="en-US" sz="4800" spc="-1" strike="noStrike">
               <a:latin typeface="Arial"/>
             </a:endParaRPr>
           </a:p>
@@ -6791,67 +6797,14 @@
       </p:grpSpPr>
       <p:sp>
         <p:nvSpPr>
-          <p:cNvPr id="110" name="Затемнение"/>
+          <p:cNvPr id="110" name="Чип_1"/>
           <p:cNvSpPr/>
           <p:nvPr/>
         </p:nvSpPr>
         <p:spPr>
           <a:xfrm>
-            <a:off x="0" y="1328040"/>
-            <a:ext cx="12188520" cy="5529600"/>
-          </a:xfrm>
-          <a:prstGeom prst="rect">
-            <a:avLst/>
-          </a:prstGeom>
-          <a:solidFill>
-            <a:srgbClr val="d9d9d9"/>
-          </a:solidFill>
-          <a:ln w="0">
-            <a:noFill/>
-          </a:ln>
-        </p:spPr>
-        <p:style>
-          <a:lnRef idx="0"/>
-          <a:fillRef idx="0"/>
-          <a:effectRef idx="0"/>
-          <a:fontRef idx="minor"/>
-        </p:style>
-        <p:txBody>
-          <a:bodyPr lIns="90000" rIns="90000" tIns="45000" bIns="45000" anchor="ctr">
-            <a:noAutofit/>
-          </a:bodyPr>
-          <a:p>
-            <a:pPr algn="ctr">
-              <a:lnSpc>
-                <a:spcPct val="100000"/>
-              </a:lnSpc>
-              <a:buNone/>
-            </a:pPr>
-            <a:r>
-              <a:rPr b="0" lang="en-US" sz="1800" spc="-1" strike="noStrike">
-                <a:solidFill>
-                  <a:srgbClr val="ffffff"/>
-                </a:solidFill>
-                <a:latin typeface="Calibri"/>
-              </a:rPr>
-              <a:t>PIC</a:t>
-            </a:r>
-            <a:endParaRPr b="0" lang="en-US" sz="1800" spc="-1" strike="noStrike">
-              <a:latin typeface="Arial"/>
-            </a:endParaRPr>
-          </a:p>
-        </p:txBody>
-      </p:sp>
-      <p:sp>
-        <p:nvSpPr>
-          <p:cNvPr id="111" name="Чип_1"/>
-          <p:cNvSpPr/>
-          <p:nvPr/>
-        </p:nvSpPr>
-        <p:spPr>
-          <a:xfrm>
-            <a:off x="474480" y="5290560"/>
-            <a:ext cx="4673880" cy="1255680"/>
+            <a:off x="639360" y="5290560"/>
+            <a:ext cx="5315040" cy="1255680"/>
           </a:xfrm>
           <a:prstGeom prst="roundRect">
             <a:avLst>
@@ -6879,13 +6832,13 @@
       </p:sp>
       <p:sp>
         <p:nvSpPr>
-          <p:cNvPr id="112" name="SUBTITLE 2"/>
+          <p:cNvPr id="111" name="SUBTITLE 2"/>
           <p:cNvSpPr/>
           <p:nvPr/>
         </p:nvSpPr>
         <p:spPr>
           <a:xfrm>
-            <a:off x="639360" y="5413320"/>
+            <a:off x="803880" y="5413320"/>
             <a:ext cx="4345920" cy="465480"/>
           </a:xfrm>
           <a:prstGeom prst="rect">
@@ -6934,13 +6887,13 @@
       </p:sp>
       <p:sp>
         <p:nvSpPr>
-          <p:cNvPr id="113" name="TEXT 2"/>
+          <p:cNvPr id="112" name="TEXT 2"/>
           <p:cNvSpPr/>
           <p:nvPr/>
         </p:nvSpPr>
         <p:spPr>
           <a:xfrm>
-            <a:off x="639360" y="5952240"/>
+            <a:off x="803880" y="5952240"/>
             <a:ext cx="4345920" cy="502560"/>
           </a:xfrm>
           <a:prstGeom prst="rect">
@@ -6987,94 +6940,16 @@
           </a:p>
         </p:txBody>
       </p:sp>
-      <p:pic>
-        <p:nvPicPr>
-          <p:cNvPr id="114" name="Кнопка_Навигация_Фон" descr="/home/claude/vistas/assets/grad_circle.png"/>
-          <p:cNvPicPr/>
-          <p:nvPr/>
-        </p:nvPicPr>
-        <p:blipFill>
-          <a:blip r:embed="rId1"/>
-          <a:stretch/>
-        </p:blipFill>
-        <p:spPr>
-          <a:xfrm>
-            <a:off x="11228760" y="5897880"/>
-            <a:ext cx="502560" cy="502560"/>
-          </a:xfrm>
-          <a:prstGeom prst="rect">
-            <a:avLst/>
-          </a:prstGeom>
-          <a:ln w="0">
-            <a:noFill/>
-          </a:ln>
-        </p:spPr>
-      </p:pic>
-      <p:sp>
-        <p:nvSpPr>
-          <p:cNvPr id="115" name="Кнопка_Навигация_Стрелка"/>
+      <p:sp>
+        <p:nvSpPr>
+          <p:cNvPr id="113" name="Чип_1"/>
           <p:cNvSpPr/>
           <p:nvPr/>
         </p:nvSpPr>
         <p:spPr>
           <a:xfrm>
-            <a:off x="11228760" y="5897880"/>
-            <a:ext cx="502560" cy="502560"/>
-          </a:xfrm>
-          <a:prstGeom prst="rect">
-            <a:avLst/>
-          </a:prstGeom>
-          <a:noFill/>
-          <a:ln w="0">
-            <a:noFill/>
-          </a:ln>
-        </p:spPr>
-        <p:style>
-          <a:lnRef idx="0"/>
-          <a:fillRef idx="0"/>
-          <a:effectRef idx="0"/>
-          <a:fontRef idx="minor"/>
-        </p:style>
-        <p:txBody>
-          <a:bodyPr lIns="0" rIns="0" tIns="0" bIns="0" anchor="ctr">
-            <a:noAutofit/>
-          </a:bodyPr>
-          <a:p>
-            <a:pPr algn="ctr">
-              <a:lnSpc>
-                <a:spcPct val="100000"/>
-              </a:lnSpc>
-              <a:buNone/>
-              <a:tabLst>
-                <a:tab algn="l" pos="0"/>
-              </a:tabLst>
-            </a:pPr>
-            <a:r>
-              <a:rPr b="1" lang="en-US" sz="2000" spc="-1" strike="noStrike">
-                <a:solidFill>
-                  <a:srgbClr val="ffffff"/>
-                </a:solidFill>
-                <a:latin typeface="Arial"/>
-                <a:ea typeface="Arial"/>
-              </a:rPr>
-              <a:t>→</a:t>
-            </a:r>
-            <a:endParaRPr b="0" lang="en-US" sz="2000" spc="-1" strike="noStrike">
-              <a:latin typeface="Arial"/>
-            </a:endParaRPr>
-          </a:p>
-        </p:txBody>
-      </p:sp>
-      <p:sp>
-        <p:nvSpPr>
-          <p:cNvPr id="116" name="Чип_1"/>
-          <p:cNvSpPr/>
-          <p:nvPr/>
-        </p:nvSpPr>
-        <p:spPr>
-          <a:xfrm>
-            <a:off x="5677560" y="5290560"/>
-            <a:ext cx="4673880" cy="1255680"/>
+            <a:off x="6234480" y="5290560"/>
+            <a:ext cx="5313240" cy="1255680"/>
           </a:xfrm>
           <a:prstGeom prst="roundRect">
             <a:avLst>
@@ -7102,13 +6977,13 @@
       </p:sp>
       <p:sp>
         <p:nvSpPr>
-          <p:cNvPr id="117" name="SUBTITLE 2"/>
+          <p:cNvPr id="114" name="SUBTITLE 2"/>
           <p:cNvSpPr/>
           <p:nvPr/>
         </p:nvSpPr>
         <p:spPr>
           <a:xfrm>
-            <a:off x="5842080" y="5413320"/>
+            <a:off x="6399000" y="5413320"/>
             <a:ext cx="4345920" cy="465480"/>
           </a:xfrm>
           <a:prstGeom prst="rect">
@@ -7167,13 +7042,13 @@
       </p:sp>
       <p:sp>
         <p:nvSpPr>
-          <p:cNvPr id="118" name="TEXT 2"/>
+          <p:cNvPr id="115" name="TEXT 2"/>
           <p:cNvSpPr/>
           <p:nvPr/>
         </p:nvSpPr>
         <p:spPr>
           <a:xfrm>
-            <a:off x="5842080" y="5952240"/>
+            <a:off x="6399000" y="5952240"/>
             <a:ext cx="4345920" cy="502560"/>
           </a:xfrm>
           <a:prstGeom prst="rect">
@@ -7232,14 +7107,14 @@
       </p:sp>
       <p:sp>
         <p:nvSpPr>
-          <p:cNvPr id="119" name="Чип_1"/>
+          <p:cNvPr id="116" name="Чип_1"/>
           <p:cNvSpPr/>
           <p:nvPr/>
         </p:nvSpPr>
         <p:spPr>
           <a:xfrm>
-            <a:off x="474480" y="4143240"/>
-            <a:ext cx="9876960" cy="977040"/>
+            <a:off x="639360" y="4143240"/>
+            <a:ext cx="10908360" cy="977040"/>
           </a:xfrm>
           <a:prstGeom prst="roundRect">
             <a:avLst>
@@ -7267,13 +7142,13 @@
       </p:sp>
       <p:sp>
         <p:nvSpPr>
-          <p:cNvPr id="120" name="SUBTITLE 2"/>
+          <p:cNvPr id="117" name="SUBTITLE 2"/>
           <p:cNvSpPr/>
           <p:nvPr/>
         </p:nvSpPr>
         <p:spPr>
           <a:xfrm>
-            <a:off x="639360" y="4143240"/>
+            <a:off x="803880" y="4143240"/>
             <a:ext cx="9549000" cy="309600"/>
           </a:xfrm>
           <a:prstGeom prst="rect">
@@ -7332,13 +7207,13 @@
       </p:sp>
       <p:sp>
         <p:nvSpPr>
-          <p:cNvPr id="121" name="TEXT 2"/>
+          <p:cNvPr id="118" name="TEXT 2"/>
           <p:cNvSpPr/>
           <p:nvPr/>
         </p:nvSpPr>
         <p:spPr>
           <a:xfrm>
-            <a:off x="639360" y="4526280"/>
+            <a:off x="803880" y="4526280"/>
             <a:ext cx="9549000" cy="502560"/>
           </a:xfrm>
           <a:prstGeom prst="rect">
@@ -7397,7 +7272,7 @@
       </p:sp>
       <p:sp>
         <p:nvSpPr>
-          <p:cNvPr id="122" name="TITLE"/>
+          <p:cNvPr id="119" name="TITLE"/>
           <p:cNvSpPr/>
           <p:nvPr/>
         </p:nvSpPr>
@@ -7445,6 +7320,66 @@
               <a:t>TITLE</a:t>
             </a:r>
             <a:endParaRPr b="0" lang="en-US" sz="3200" spc="-1" strike="noStrike">
+              <a:latin typeface="Arial"/>
+            </a:endParaRPr>
+          </a:p>
+        </p:txBody>
+      </p:sp>
+      <p:sp>
+        <p:nvSpPr>
+          <p:cNvPr id="120" name="PIC 1"/>
+          <p:cNvSpPr/>
+          <p:nvPr/>
+        </p:nvSpPr>
+        <p:spPr>
+          <a:xfrm>
+            <a:off x="638280" y="1410840"/>
+            <a:ext cx="10908360" cy="2447640"/>
+          </a:xfrm>
+          <a:prstGeom prst="roundRect">
+            <a:avLst>
+              <a:gd name="adj" fmla="val 4706"/>
+            </a:avLst>
+          </a:prstGeom>
+          <a:solidFill>
+            <a:schemeClr val="bg1">
+              <a:lumMod val="85000"/>
+            </a:schemeClr>
+          </a:solidFill>
+          <a:ln w="9525">
+            <a:solidFill>
+              <a:srgbClr val="6e6e6e"/>
+            </a:solidFill>
+            <a:round/>
+          </a:ln>
+        </p:spPr>
+        <p:style>
+          <a:lnRef idx="0"/>
+          <a:fillRef idx="0"/>
+          <a:effectRef idx="0"/>
+          <a:fontRef idx="minor"/>
+        </p:style>
+        <p:txBody>
+          <a:bodyPr lIns="90000" rIns="90000" tIns="45000" bIns="45000" anchor="ctr">
+            <a:noAutofit/>
+          </a:bodyPr>
+          <a:p>
+            <a:pPr algn="ctr">
+              <a:lnSpc>
+                <a:spcPct val="100000"/>
+              </a:lnSpc>
+              <a:buNone/>
+            </a:pPr>
+            <a:r>
+              <a:rPr b="0" lang="en-US" sz="1800" spc="-1" strike="noStrike">
+                <a:solidFill>
+                  <a:srgbClr val="ffffff"/>
+                </a:solidFill>
+                <a:latin typeface="Calibri"/>
+              </a:rPr>
+              <a:t>PIC</a:t>
+            </a:r>
+            <a:endParaRPr b="0" lang="en-US" sz="1800" spc="-1" strike="noStrike">
               <a:latin typeface="Arial"/>
             </a:endParaRPr>
           </a:p>
@@ -7489,7 +7424,7 @@
       </p:grpSpPr>
       <p:pic>
         <p:nvPicPr>
-          <p:cNvPr id="123" name="Градиент_Фон" descr="/home/claude/vistas/assets/grad_full_diagonal.png"/>
+          <p:cNvPr id="121" name="Градиент_Фон" descr="/home/claude/vistas/assets/grad_full_diagonal.png"/>
           <p:cNvPicPr/>
           <p:nvPr/>
         </p:nvPicPr>
@@ -7512,7 +7447,7 @@
       </p:pic>
       <p:sp>
         <p:nvSpPr>
-          <p:cNvPr id="124" name="TITLE"/>
+          <p:cNvPr id="122" name="TITLE"/>
           <p:cNvSpPr/>
           <p:nvPr/>
         </p:nvSpPr>
